--- a/HairSalonLink_営業資料.pptx
+++ b/HairSalonLink_営業資料.pptx
@@ -5064,7 +5064,7 @@
                 <a:ea typeface="Calibri" pitchFamily="34" charset="-122"/>
                 <a:cs typeface="Calibri" pitchFamily="34" charset="-120"/>
               </a:rPr>
-              <a:t>support@hairsalonlink.demo</a:t>
+              <a:t>shibahara.724@gmail.com</a:t>
             </a:r>
             <a:endParaRPr lang="en-US" sz="1000" dirty="0"/>
           </a:p>
